--- a/static/uploads/operations_research.pptx
+++ b/static/uploads/operations_research.pptx
@@ -10069,7 +10069,7 @@
                 <a:ea typeface="Calibri" pitchFamily="34" charset="-122"/>
                 <a:cs typeface="Calibri" pitchFamily="34" charset="-120"/>
               </a:rPr>
-              <a:t>Adeleke Olorunnisola Oyeyemi · olorunnisola01@gmail.com · olorunnisola01.netlify.app</a:t>
+              <a:t>Adeleke Olorunnisola Oyeyemi · olorunnisola01@gmail.com · olorunnisola.netlify.app</a:t>
             </a:r>
             <a:endParaRPr lang="en-US" sz="1200" dirty="0"/>
           </a:p>
